--- a/Fase1/03_results/Evaluación PID– Plataforma plana  .pptx
+++ b/Fase1/03_results/Evaluación PID– Plataforma plana  .pptx
@@ -203,7 +203,7 @@
           <a:p>
             <a:fld id="{ADE501B8-5F5A-6244-BB8E-8FD7F2B84493}" type="datetimeFigureOut">
               <a:rPr lang="es-ES_tradnl" smtClean="0"/>
-              <a:t>28/3/26</a:t>
+              <a:t>6/4/26</a:t>
             </a:fld>
             <a:endParaRPr lang="es-ES_tradnl"/>
           </a:p>
@@ -740,7 +740,7 @@
           <a:p>
             <a:fld id="{C8AEA480-F5A7-DA40-A230-5196D0093B92}" type="datetimeFigureOut">
               <a:rPr lang="es-ES_tradnl" smtClean="0"/>
-              <a:t>28/3/26</a:t>
+              <a:t>6/4/26</a:t>
             </a:fld>
             <a:endParaRPr lang="es-ES_tradnl"/>
           </a:p>
@@ -940,7 +940,7 @@
           <a:p>
             <a:fld id="{C8AEA480-F5A7-DA40-A230-5196D0093B92}" type="datetimeFigureOut">
               <a:rPr lang="es-ES_tradnl" smtClean="0"/>
-              <a:t>28/3/26</a:t>
+              <a:t>6/4/26</a:t>
             </a:fld>
             <a:endParaRPr lang="es-ES_tradnl"/>
           </a:p>
@@ -1150,7 +1150,7 @@
           <a:p>
             <a:fld id="{C8AEA480-F5A7-DA40-A230-5196D0093B92}" type="datetimeFigureOut">
               <a:rPr lang="es-ES_tradnl" smtClean="0"/>
-              <a:t>28/3/26</a:t>
+              <a:t>6/4/26</a:t>
             </a:fld>
             <a:endParaRPr lang="es-ES_tradnl"/>
           </a:p>
@@ -2345,7 +2345,7 @@
           <a:p>
             <a:fld id="{C8AEA480-F5A7-DA40-A230-5196D0093B92}" type="datetimeFigureOut">
               <a:rPr lang="es-ES_tradnl" smtClean="0"/>
-              <a:t>28/3/26</a:t>
+              <a:t>6/4/26</a:t>
             </a:fld>
             <a:endParaRPr lang="es-ES_tradnl"/>
           </a:p>
@@ -2621,7 +2621,7 @@
           <a:p>
             <a:fld id="{C8AEA480-F5A7-DA40-A230-5196D0093B92}" type="datetimeFigureOut">
               <a:rPr lang="es-ES_tradnl" smtClean="0"/>
-              <a:t>28/3/26</a:t>
+              <a:t>6/4/26</a:t>
             </a:fld>
             <a:endParaRPr lang="es-ES_tradnl"/>
           </a:p>
@@ -2889,7 +2889,7 @@
           <a:p>
             <a:fld id="{C8AEA480-F5A7-DA40-A230-5196D0093B92}" type="datetimeFigureOut">
               <a:rPr lang="es-ES_tradnl" smtClean="0"/>
-              <a:t>28/3/26</a:t>
+              <a:t>6/4/26</a:t>
             </a:fld>
             <a:endParaRPr lang="es-ES_tradnl"/>
           </a:p>
@@ -3304,7 +3304,7 @@
           <a:p>
             <a:fld id="{C8AEA480-F5A7-DA40-A230-5196D0093B92}" type="datetimeFigureOut">
               <a:rPr lang="es-ES_tradnl" smtClean="0"/>
-              <a:t>28/3/26</a:t>
+              <a:t>6/4/26</a:t>
             </a:fld>
             <a:endParaRPr lang="es-ES_tradnl"/>
           </a:p>
@@ -3446,7 +3446,7 @@
           <a:p>
             <a:fld id="{C8AEA480-F5A7-DA40-A230-5196D0093B92}" type="datetimeFigureOut">
               <a:rPr lang="es-ES_tradnl" smtClean="0"/>
-              <a:t>28/3/26</a:t>
+              <a:t>6/4/26</a:t>
             </a:fld>
             <a:endParaRPr lang="es-ES_tradnl"/>
           </a:p>
@@ -3559,7 +3559,7 @@
           <a:p>
             <a:fld id="{C8AEA480-F5A7-DA40-A230-5196D0093B92}" type="datetimeFigureOut">
               <a:rPr lang="es-ES_tradnl" smtClean="0"/>
-              <a:t>28/3/26</a:t>
+              <a:t>6/4/26</a:t>
             </a:fld>
             <a:endParaRPr lang="es-ES_tradnl"/>
           </a:p>
@@ -3872,7 +3872,7 @@
           <a:p>
             <a:fld id="{C8AEA480-F5A7-DA40-A230-5196D0093B92}" type="datetimeFigureOut">
               <a:rPr lang="es-ES_tradnl" smtClean="0"/>
-              <a:t>28/3/26</a:t>
+              <a:t>6/4/26</a:t>
             </a:fld>
             <a:endParaRPr lang="es-ES_tradnl"/>
           </a:p>
@@ -4161,7 +4161,7 @@
           <a:p>
             <a:fld id="{C8AEA480-F5A7-DA40-A230-5196D0093B92}" type="datetimeFigureOut">
               <a:rPr lang="es-ES_tradnl" smtClean="0"/>
-              <a:t>28/3/26</a:t>
+              <a:t>6/4/26</a:t>
             </a:fld>
             <a:endParaRPr lang="es-ES_tradnl"/>
           </a:p>
@@ -4404,7 +4404,7 @@
           <a:p>
             <a:fld id="{C8AEA480-F5A7-DA40-A230-5196D0093B92}" type="datetimeFigureOut">
               <a:rPr lang="es-ES_tradnl" smtClean="0"/>
-              <a:t>28/3/26</a:t>
+              <a:t>6/4/26</a:t>
             </a:fld>
             <a:endParaRPr lang="es-ES_tradnl"/>
           </a:p>
@@ -4861,38 +4861,6 @@
           </a:p>
         </p:txBody>
       </p:sp>
-      <p:pic>
-        <p:nvPicPr>
-          <p:cNvPr id="6" name="Onlinebild-Platzhalter 5">
-            <a:extLst>
-              <a:ext uri="{FF2B5EF4-FFF2-40B4-BE49-F238E27FC236}">
-                <a16:creationId xmlns:a16="http://schemas.microsoft.com/office/drawing/2014/main" id="{C02CF8D8-7D86-9732-B21A-9DAEE20908EB}"/>
-              </a:ext>
-            </a:extLst>
-          </p:cNvPr>
-          <p:cNvPicPr>
-            <a:picLocks noGrp="1" noChangeAspect="1"/>
-          </p:cNvPicPr>
-          <p:nvPr>
-            <p:ph type="clipArt" sz="quarter" idx="15"/>
-          </p:nvPr>
-        </p:nvPicPr>
-        <p:blipFill>
-          <a:blip r:embed="rId2"/>
-          <a:stretch>
-            <a:fillRect/>
-          </a:stretch>
-        </p:blipFill>
-        <p:spPr>
-          <a:xfrm>
-            <a:off x="583920" y="2151063"/>
-            <a:ext cx="5239310" cy="4008437"/>
-          </a:xfrm>
-          <a:prstGeom prst="rect">
-            <a:avLst/>
-          </a:prstGeom>
-        </p:spPr>
-      </p:pic>
       <p:sp>
         <p:nvSpPr>
           <p:cNvPr id="7" name="Inhaltsplatzhalter 6">
@@ -5154,6 +5122,38 @@
           </a:p>
         </p:txBody>
       </p:sp>
+      <p:pic>
+        <p:nvPicPr>
+          <p:cNvPr id="9" name="Onlinebild-Platzhalter 8">
+            <a:extLst>
+              <a:ext uri="{FF2B5EF4-FFF2-40B4-BE49-F238E27FC236}">
+                <a16:creationId xmlns:a16="http://schemas.microsoft.com/office/drawing/2014/main" id="{A06C8478-EF59-12A5-AC95-52D63C4E7CDF}"/>
+              </a:ext>
+            </a:extLst>
+          </p:cNvPr>
+          <p:cNvPicPr>
+            <a:picLocks noGrp="1" noChangeAspect="1"/>
+          </p:cNvPicPr>
+          <p:nvPr>
+            <p:ph type="clipArt" sz="quarter" idx="15"/>
+          </p:nvPr>
+        </p:nvPicPr>
+        <p:blipFill>
+          <a:blip r:embed="rId2"/>
+          <a:stretch>
+            <a:fillRect/>
+          </a:stretch>
+        </p:blipFill>
+        <p:spPr>
+          <a:xfrm>
+            <a:off x="583920" y="2151063"/>
+            <a:ext cx="5239310" cy="4008437"/>
+          </a:xfrm>
+          <a:prstGeom prst="rect">
+            <a:avLst/>
+          </a:prstGeom>
+        </p:spPr>
+      </p:pic>
     </p:spTree>
     <p:extLst>
       <p:ext uri="{BB962C8B-B14F-4D97-AF65-F5344CB8AC3E}">
@@ -5270,7 +5270,7 @@
             <p:ph sz="quarter" idx="14"/>
             <p:extLst>
               <p:ext uri="{D42A27DB-BD31-4B8C-83A1-F6EECF244321}">
-                <p14:modId xmlns:p14="http://schemas.microsoft.com/office/powerpoint/2010/main" val="3013951616"/>
+                <p14:modId xmlns:p14="http://schemas.microsoft.com/office/powerpoint/2010/main" val="638906624"/>
               </p:ext>
             </p:extLst>
           </p:nvPr>
@@ -6620,14 +6620,20 @@
                         <a:buNone/>
                       </a:pPr>
                       <a:r>
-                        <a:rPr lang="es-ES_tradnl" sz="900" dirty="0">
+                        <a:rPr lang="es-ES" sz="900">
                           <a:effectLst/>
                           <a:latin typeface="Times New Roman" panose="02020603050405020304" pitchFamily="18" charset="0"/>
                           <a:ea typeface="Times New Roman" panose="02020603050405020304" pitchFamily="18" charset="0"/>
                           <a:cs typeface="Times New Roman" panose="02020603050405020304" pitchFamily="18" charset="0"/>
                         </a:rPr>
-                        <a:t>161.01</a:t>
-                      </a:r>
+                        <a:t>6.00</a:t>
+                      </a:r>
+                      <a:endParaRPr lang="de-DE" sz="900">
+                        <a:effectLst/>
+                        <a:latin typeface="Times New Roman" panose="02020603050405020304" pitchFamily="18" charset="0"/>
+                        <a:ea typeface="Times New Roman" panose="02020603050405020304" pitchFamily="18" charset="0"/>
+                        <a:cs typeface="Times New Roman" panose="02020603050405020304" pitchFamily="18" charset="0"/>
+                      </a:endParaRPr>
                     </a:p>
                   </a:txBody>
                   <a:tcPr marL="68580" marR="68580" marT="0" marB="0">
@@ -6652,14 +6658,20 @@
                         <a:buNone/>
                       </a:pPr>
                       <a:r>
-                        <a:rPr lang="es-ES_tradnl" sz="900" dirty="0">
+                        <a:rPr lang="es-ES" sz="900">
                           <a:effectLst/>
                           <a:latin typeface="Times New Roman" panose="02020603050405020304" pitchFamily="18" charset="0"/>
                           <a:ea typeface="Times New Roman" panose="02020603050405020304" pitchFamily="18" charset="0"/>
                           <a:cs typeface="Times New Roman" panose="02020603050405020304" pitchFamily="18" charset="0"/>
                         </a:rPr>
-                        <a:t>23.60</a:t>
-                      </a:r>
+                        <a:t>1.44</a:t>
+                      </a:r>
+                      <a:endParaRPr lang="de-DE" sz="900">
+                        <a:effectLst/>
+                        <a:latin typeface="Times New Roman" panose="02020603050405020304" pitchFamily="18" charset="0"/>
+                        <a:ea typeface="Times New Roman" panose="02020603050405020304" pitchFamily="18" charset="0"/>
+                        <a:cs typeface="Times New Roman" panose="02020603050405020304" pitchFamily="18" charset="0"/>
+                      </a:endParaRPr>
                     </a:p>
                   </a:txBody>
                   <a:tcPr marL="68580" marR="68580" marT="0" marB="0">
@@ -6684,14 +6696,20 @@
                         <a:buNone/>
                       </a:pPr>
                       <a:r>
-                        <a:rPr lang="es-ES_tradnl" sz="900" dirty="0">
+                        <a:rPr lang="es-ES" sz="900">
                           <a:effectLst/>
                           <a:latin typeface="Times New Roman" panose="02020603050405020304" pitchFamily="18" charset="0"/>
                           <a:ea typeface="Times New Roman" panose="02020603050405020304" pitchFamily="18" charset="0"/>
                           <a:cs typeface="Times New Roman" panose="02020603050405020304" pitchFamily="18" charset="0"/>
                         </a:rPr>
-                        <a:t>147.62</a:t>
-                      </a:r>
+                        <a:t>7.10</a:t>
+                      </a:r>
+                      <a:endParaRPr lang="de-DE" sz="900">
+                        <a:effectLst/>
+                        <a:latin typeface="Times New Roman" panose="02020603050405020304" pitchFamily="18" charset="0"/>
+                        <a:ea typeface="Times New Roman" panose="02020603050405020304" pitchFamily="18" charset="0"/>
+                        <a:cs typeface="Times New Roman" panose="02020603050405020304" pitchFamily="18" charset="0"/>
+                      </a:endParaRPr>
                     </a:p>
                   </a:txBody>
                   <a:tcPr marL="68580" marR="68580" marT="0" marB="0">
@@ -6716,14 +6734,20 @@
                         <a:buNone/>
                       </a:pPr>
                       <a:r>
-                        <a:rPr lang="es-ES_tradnl" sz="900" dirty="0">
+                        <a:rPr lang="es-ES" sz="900">
                           <a:effectLst/>
                           <a:latin typeface="Times New Roman" panose="02020603050405020304" pitchFamily="18" charset="0"/>
                           <a:ea typeface="Times New Roman" panose="02020603050405020304" pitchFamily="18" charset="0"/>
                           <a:cs typeface="Times New Roman" panose="02020603050405020304" pitchFamily="18" charset="0"/>
                         </a:rPr>
-                        <a:t>3.21</a:t>
-                      </a:r>
+                        <a:t>3.22</a:t>
+                      </a:r>
+                      <a:endParaRPr lang="de-DE" sz="900">
+                        <a:effectLst/>
+                        <a:latin typeface="Times New Roman" panose="02020603050405020304" pitchFamily="18" charset="0"/>
+                        <a:ea typeface="Times New Roman" panose="02020603050405020304" pitchFamily="18" charset="0"/>
+                        <a:cs typeface="Times New Roman" panose="02020603050405020304" pitchFamily="18" charset="0"/>
+                      </a:endParaRPr>
                     </a:p>
                   </a:txBody>
                   <a:tcPr marL="68580" marR="68580" marT="0" marB="0">
@@ -6748,14 +6772,20 @@
                         <a:buNone/>
                       </a:pPr>
                       <a:r>
-                        <a:rPr lang="es-ES_tradnl" sz="900" dirty="0">
+                        <a:rPr lang="es-ES" sz="900">
                           <a:effectLst/>
                           <a:latin typeface="Times New Roman" panose="02020603050405020304" pitchFamily="18" charset="0"/>
                           <a:ea typeface="Times New Roman" panose="02020603050405020304" pitchFamily="18" charset="0"/>
                           <a:cs typeface="Times New Roman" panose="02020603050405020304" pitchFamily="18" charset="0"/>
                         </a:rPr>
-                        <a:t>163.67</a:t>
-                      </a:r>
+                        <a:t>7.76</a:t>
+                      </a:r>
+                      <a:endParaRPr lang="de-DE" sz="900">
+                        <a:effectLst/>
+                        <a:latin typeface="Times New Roman" panose="02020603050405020304" pitchFamily="18" charset="0"/>
+                        <a:ea typeface="Times New Roman" panose="02020603050405020304" pitchFamily="18" charset="0"/>
+                        <a:cs typeface="Times New Roman" panose="02020603050405020304" pitchFamily="18" charset="0"/>
+                      </a:endParaRPr>
                     </a:p>
                   </a:txBody>
                   <a:tcPr marL="68580" marR="68580" marT="0" marB="0">
@@ -7043,106 +7073,136 @@
                         <a:buNone/>
                       </a:pPr>
                       <a:r>
-                        <a:rPr lang="es-ES_tradnl" sz="900" dirty="0">
+                        <a:rPr lang="es-ES" sz="900">
                           <a:effectLst/>
                           <a:latin typeface="Times New Roman" panose="02020603050405020304" pitchFamily="18" charset="0"/>
                           <a:ea typeface="Times New Roman" panose="02020603050405020304" pitchFamily="18" charset="0"/>
                           <a:cs typeface="Times New Roman" panose="02020603050405020304" pitchFamily="18" charset="0"/>
                         </a:rPr>
-                        <a:t>161.01</a:t>
-                      </a:r>
-                    </a:p>
-                  </a:txBody>
-                  <a:tcPr marL="68580" marR="68580" marT="0" marB="0">
-                    <a:noFill/>
-                  </a:tcPr>
-                </a:tc>
-                <a:tc>
-                  <a:txBody>
-                    <a:bodyPr/>
-                    <a:lstStyle/>
-                    <a:p>
-                      <a:pPr algn="ctr">
-                        <a:buNone/>
-                      </a:pPr>
-                      <a:r>
-                        <a:rPr lang="es-ES_tradnl" sz="900" dirty="0">
+                        <a:t>6.00</a:t>
+                      </a:r>
+                      <a:endParaRPr lang="de-DE" sz="900">
+                        <a:effectLst/>
+                        <a:latin typeface="Times New Roman" panose="02020603050405020304" pitchFamily="18" charset="0"/>
+                        <a:ea typeface="Times New Roman" panose="02020603050405020304" pitchFamily="18" charset="0"/>
+                        <a:cs typeface="Times New Roman" panose="02020603050405020304" pitchFamily="18" charset="0"/>
+                      </a:endParaRPr>
+                    </a:p>
+                  </a:txBody>
+                  <a:tcPr marL="68580" marR="68580" marT="0" marB="0">
+                    <a:noFill/>
+                  </a:tcPr>
+                </a:tc>
+                <a:tc>
+                  <a:txBody>
+                    <a:bodyPr/>
+                    <a:lstStyle/>
+                    <a:p>
+                      <a:pPr algn="ctr">
+                        <a:buNone/>
+                      </a:pPr>
+                      <a:r>
+                        <a:rPr lang="es-ES" sz="900">
                           <a:effectLst/>
                           <a:latin typeface="Times New Roman" panose="02020603050405020304" pitchFamily="18" charset="0"/>
                           <a:ea typeface="Times New Roman" panose="02020603050405020304" pitchFamily="18" charset="0"/>
                           <a:cs typeface="Times New Roman" panose="02020603050405020304" pitchFamily="18" charset="0"/>
                         </a:rPr>
-                        <a:t>23.60</a:t>
-                      </a:r>
-                    </a:p>
-                  </a:txBody>
-                  <a:tcPr marL="68580" marR="68580" marT="0" marB="0">
-                    <a:noFill/>
-                  </a:tcPr>
-                </a:tc>
-                <a:tc>
-                  <a:txBody>
-                    <a:bodyPr/>
-                    <a:lstStyle/>
-                    <a:p>
-                      <a:pPr algn="ctr">
-                        <a:buNone/>
-                      </a:pPr>
-                      <a:r>
-                        <a:rPr lang="es-ES_tradnl" sz="900" dirty="0">
+                        <a:t>1.44</a:t>
+                      </a:r>
+                      <a:endParaRPr lang="de-DE" sz="900">
+                        <a:effectLst/>
+                        <a:latin typeface="Times New Roman" panose="02020603050405020304" pitchFamily="18" charset="0"/>
+                        <a:ea typeface="Times New Roman" panose="02020603050405020304" pitchFamily="18" charset="0"/>
+                        <a:cs typeface="Times New Roman" panose="02020603050405020304" pitchFamily="18" charset="0"/>
+                      </a:endParaRPr>
+                    </a:p>
+                  </a:txBody>
+                  <a:tcPr marL="68580" marR="68580" marT="0" marB="0">
+                    <a:noFill/>
+                  </a:tcPr>
+                </a:tc>
+                <a:tc>
+                  <a:txBody>
+                    <a:bodyPr/>
+                    <a:lstStyle/>
+                    <a:p>
+                      <a:pPr algn="ctr">
+                        <a:buNone/>
+                      </a:pPr>
+                      <a:r>
+                        <a:rPr lang="es-ES" sz="900">
                           <a:effectLst/>
                           <a:latin typeface="Times New Roman" panose="02020603050405020304" pitchFamily="18" charset="0"/>
                           <a:ea typeface="Times New Roman" panose="02020603050405020304" pitchFamily="18" charset="0"/>
                           <a:cs typeface="Times New Roman" panose="02020603050405020304" pitchFamily="18" charset="0"/>
                         </a:rPr>
-                        <a:t>147.62</a:t>
-                      </a:r>
-                    </a:p>
-                  </a:txBody>
-                  <a:tcPr marL="68580" marR="68580" marT="0" marB="0">
-                    <a:noFill/>
-                  </a:tcPr>
-                </a:tc>
-                <a:tc>
-                  <a:txBody>
-                    <a:bodyPr/>
-                    <a:lstStyle/>
-                    <a:p>
-                      <a:pPr algn="ctr">
-                        <a:buNone/>
-                      </a:pPr>
-                      <a:r>
-                        <a:rPr lang="es-ES_tradnl" sz="900" dirty="0">
+                        <a:t>7.10</a:t>
+                      </a:r>
+                      <a:endParaRPr lang="de-DE" sz="900">
+                        <a:effectLst/>
+                        <a:latin typeface="Times New Roman" panose="02020603050405020304" pitchFamily="18" charset="0"/>
+                        <a:ea typeface="Times New Roman" panose="02020603050405020304" pitchFamily="18" charset="0"/>
+                        <a:cs typeface="Times New Roman" panose="02020603050405020304" pitchFamily="18" charset="0"/>
+                      </a:endParaRPr>
+                    </a:p>
+                  </a:txBody>
+                  <a:tcPr marL="68580" marR="68580" marT="0" marB="0">
+                    <a:noFill/>
+                  </a:tcPr>
+                </a:tc>
+                <a:tc>
+                  <a:txBody>
+                    <a:bodyPr/>
+                    <a:lstStyle/>
+                    <a:p>
+                      <a:pPr algn="ctr">
+                        <a:buNone/>
+                      </a:pPr>
+                      <a:r>
+                        <a:rPr lang="es-ES" sz="900">
                           <a:effectLst/>
                           <a:latin typeface="Times New Roman" panose="02020603050405020304" pitchFamily="18" charset="0"/>
                           <a:ea typeface="Times New Roman" panose="02020603050405020304" pitchFamily="18" charset="0"/>
                           <a:cs typeface="Times New Roman" panose="02020603050405020304" pitchFamily="18" charset="0"/>
                         </a:rPr>
-                        <a:t>3.21</a:t>
-                      </a:r>
-                    </a:p>
-                  </a:txBody>
-                  <a:tcPr marL="68580" marR="68580" marT="0" marB="0">
-                    <a:noFill/>
-                  </a:tcPr>
-                </a:tc>
-                <a:tc>
-                  <a:txBody>
-                    <a:bodyPr/>
-                    <a:lstStyle/>
-                    <a:p>
-                      <a:pPr algn="ctr">
-                        <a:buNone/>
-                      </a:pPr>
-                      <a:r>
-                        <a:rPr lang="es-ES_tradnl" sz="900" dirty="0">
+                        <a:t>3.22</a:t>
+                      </a:r>
+                      <a:endParaRPr lang="de-DE" sz="900">
+                        <a:effectLst/>
+                        <a:latin typeface="Times New Roman" panose="02020603050405020304" pitchFamily="18" charset="0"/>
+                        <a:ea typeface="Times New Roman" panose="02020603050405020304" pitchFamily="18" charset="0"/>
+                        <a:cs typeface="Times New Roman" panose="02020603050405020304" pitchFamily="18" charset="0"/>
+                      </a:endParaRPr>
+                    </a:p>
+                  </a:txBody>
+                  <a:tcPr marL="68580" marR="68580" marT="0" marB="0">
+                    <a:noFill/>
+                  </a:tcPr>
+                </a:tc>
+                <a:tc>
+                  <a:txBody>
+                    <a:bodyPr/>
+                    <a:lstStyle/>
+                    <a:p>
+                      <a:pPr algn="ctr">
+                        <a:buNone/>
+                      </a:pPr>
+                      <a:r>
+                        <a:rPr lang="es-ES" sz="900">
                           <a:effectLst/>
                           <a:latin typeface="Times New Roman" panose="02020603050405020304" pitchFamily="18" charset="0"/>
                           <a:ea typeface="Times New Roman" panose="02020603050405020304" pitchFamily="18" charset="0"/>
                           <a:cs typeface="Times New Roman" panose="02020603050405020304" pitchFamily="18" charset="0"/>
                         </a:rPr>
-                        <a:t>163.67</a:t>
-                      </a:r>
+                        <a:t>7.76</a:t>
+                      </a:r>
+                      <a:endParaRPr lang="de-DE" sz="900">
+                        <a:effectLst/>
+                        <a:latin typeface="Times New Roman" panose="02020603050405020304" pitchFamily="18" charset="0"/>
+                        <a:ea typeface="Times New Roman" panose="02020603050405020304" pitchFamily="18" charset="0"/>
+                        <a:cs typeface="Times New Roman" panose="02020603050405020304" pitchFamily="18" charset="0"/>
+                      </a:endParaRPr>
                     </a:p>
                   </a:txBody>
                   <a:tcPr marL="68580" marR="68580" marT="0" marB="0">
@@ -7421,106 +7481,136 @@
                         <a:buNone/>
                       </a:pPr>
                       <a:r>
-                        <a:rPr lang="es-ES_tradnl" sz="900" dirty="0">
+                        <a:rPr lang="es-ES" sz="900">
                           <a:effectLst/>
                           <a:latin typeface="Times New Roman" panose="02020603050405020304" pitchFamily="18" charset="0"/>
                           <a:ea typeface="Times New Roman" panose="02020603050405020304" pitchFamily="18" charset="0"/>
                           <a:cs typeface="Times New Roman" panose="02020603050405020304" pitchFamily="18" charset="0"/>
                         </a:rPr>
-                        <a:t>483.02</a:t>
-                      </a:r>
-                    </a:p>
-                  </a:txBody>
-                  <a:tcPr marL="68580" marR="68580" marT="0" marB="0">
-                    <a:noFill/>
-                  </a:tcPr>
-                </a:tc>
-                <a:tc>
-                  <a:txBody>
-                    <a:bodyPr/>
-                    <a:lstStyle/>
-                    <a:p>
-                      <a:pPr algn="ctr">
-                        <a:buNone/>
-                      </a:pPr>
-                      <a:r>
-                        <a:rPr lang="es-ES_tradnl" sz="900" dirty="0">
+                        <a:t>6.00</a:t>
+                      </a:r>
+                      <a:endParaRPr lang="de-DE" sz="900">
+                        <a:effectLst/>
+                        <a:latin typeface="Times New Roman" panose="02020603050405020304" pitchFamily="18" charset="0"/>
+                        <a:ea typeface="Times New Roman" panose="02020603050405020304" pitchFamily="18" charset="0"/>
+                        <a:cs typeface="Times New Roman" panose="02020603050405020304" pitchFamily="18" charset="0"/>
+                      </a:endParaRPr>
+                    </a:p>
+                  </a:txBody>
+                  <a:tcPr marL="68580" marR="68580" marT="0" marB="0">
+                    <a:noFill/>
+                  </a:tcPr>
+                </a:tc>
+                <a:tc>
+                  <a:txBody>
+                    <a:bodyPr/>
+                    <a:lstStyle/>
+                    <a:p>
+                      <a:pPr algn="ctr">
+                        <a:buNone/>
+                      </a:pPr>
+                      <a:r>
+                        <a:rPr lang="es-ES" sz="900">
                           <a:effectLst/>
                           <a:latin typeface="Times New Roman" panose="02020603050405020304" pitchFamily="18" charset="0"/>
                           <a:ea typeface="Times New Roman" panose="02020603050405020304" pitchFamily="18" charset="0"/>
                           <a:cs typeface="Times New Roman" panose="02020603050405020304" pitchFamily="18" charset="0"/>
                         </a:rPr>
-                        <a:t>84.64</a:t>
-                      </a:r>
-                    </a:p>
-                  </a:txBody>
-                  <a:tcPr marL="68580" marR="68580" marT="0" marB="0">
-                    <a:noFill/>
-                  </a:tcPr>
-                </a:tc>
-                <a:tc>
-                  <a:txBody>
-                    <a:bodyPr/>
-                    <a:lstStyle/>
-                    <a:p>
-                      <a:pPr algn="ctr">
-                        <a:buNone/>
-                      </a:pPr>
-                      <a:r>
-                        <a:rPr lang="es-ES_tradnl" sz="900" dirty="0">
+                        <a:t>2.57</a:t>
+                      </a:r>
+                      <a:endParaRPr lang="de-DE" sz="900">
+                        <a:effectLst/>
+                        <a:latin typeface="Times New Roman" panose="02020603050405020304" pitchFamily="18" charset="0"/>
+                        <a:ea typeface="Times New Roman" panose="02020603050405020304" pitchFamily="18" charset="0"/>
+                        <a:cs typeface="Times New Roman" panose="02020603050405020304" pitchFamily="18" charset="0"/>
+                      </a:endParaRPr>
+                    </a:p>
+                  </a:txBody>
+                  <a:tcPr marL="68580" marR="68580" marT="0" marB="0">
+                    <a:noFill/>
+                  </a:tcPr>
+                </a:tc>
+                <a:tc>
+                  <a:txBody>
+                    <a:bodyPr/>
+                    <a:lstStyle/>
+                    <a:p>
+                      <a:pPr algn="ctr">
+                        <a:buNone/>
+                      </a:pPr>
+                      <a:r>
+                        <a:rPr lang="es-ES" sz="900">
                           <a:effectLst/>
                           <a:latin typeface="Times New Roman" panose="02020603050405020304" pitchFamily="18" charset="0"/>
                           <a:ea typeface="Times New Roman" panose="02020603050405020304" pitchFamily="18" charset="0"/>
                           <a:cs typeface="Times New Roman" panose="02020603050405020304" pitchFamily="18" charset="0"/>
                         </a:rPr>
-                        <a:t>1364.64</a:t>
-                      </a:r>
-                    </a:p>
-                  </a:txBody>
-                  <a:tcPr marL="68580" marR="68580" marT="0" marB="0">
-                    <a:noFill/>
-                  </a:tcPr>
-                </a:tc>
-                <a:tc>
-                  <a:txBody>
-                    <a:bodyPr/>
-                    <a:lstStyle/>
-                    <a:p>
-                      <a:pPr algn="ctr">
-                        <a:buNone/>
-                      </a:pPr>
-                      <a:r>
-                        <a:rPr lang="es-ES_tradnl" sz="900" dirty="0">
+                        <a:t>36.65</a:t>
+                      </a:r>
+                      <a:endParaRPr lang="de-DE" sz="900">
+                        <a:effectLst/>
+                        <a:latin typeface="Times New Roman" panose="02020603050405020304" pitchFamily="18" charset="0"/>
+                        <a:ea typeface="Times New Roman" panose="02020603050405020304" pitchFamily="18" charset="0"/>
+                        <a:cs typeface="Times New Roman" panose="02020603050405020304" pitchFamily="18" charset="0"/>
+                      </a:endParaRPr>
+                    </a:p>
+                  </a:txBody>
+                  <a:tcPr marL="68580" marR="68580" marT="0" marB="0">
+                    <a:noFill/>
+                  </a:tcPr>
+                </a:tc>
+                <a:tc>
+                  <a:txBody>
+                    <a:bodyPr/>
+                    <a:lstStyle/>
+                    <a:p>
+                      <a:pPr algn="ctr">
+                        <a:buNone/>
+                      </a:pPr>
+                      <a:r>
+                        <a:rPr lang="es-ES" sz="900">
                           <a:effectLst/>
                           <a:latin typeface="Times New Roman" panose="02020603050405020304" pitchFamily="18" charset="0"/>
                           <a:ea typeface="Times New Roman" panose="02020603050405020304" pitchFamily="18" charset="0"/>
                           <a:cs typeface="Times New Roman" panose="02020603050405020304" pitchFamily="18" charset="0"/>
                         </a:rPr>
-                        <a:t>10.24</a:t>
-                      </a:r>
-                    </a:p>
-                  </a:txBody>
-                  <a:tcPr marL="68580" marR="68580" marT="0" marB="0">
-                    <a:noFill/>
-                  </a:tcPr>
-                </a:tc>
-                <a:tc>
-                  <a:txBody>
-                    <a:bodyPr/>
-                    <a:lstStyle/>
-                    <a:p>
-                      <a:pPr algn="ctr">
-                        <a:buNone/>
-                      </a:pPr>
-                      <a:r>
-                        <a:rPr lang="es-ES_tradnl" sz="900" dirty="0">
+                        <a:t>7.48</a:t>
+                      </a:r>
+                      <a:endParaRPr lang="de-DE" sz="900">
+                        <a:effectLst/>
+                        <a:latin typeface="Times New Roman" panose="02020603050405020304" pitchFamily="18" charset="0"/>
+                        <a:ea typeface="Times New Roman" panose="02020603050405020304" pitchFamily="18" charset="0"/>
+                        <a:cs typeface="Times New Roman" panose="02020603050405020304" pitchFamily="18" charset="0"/>
+                      </a:endParaRPr>
+                    </a:p>
+                  </a:txBody>
+                  <a:tcPr marL="68580" marR="68580" marT="0" marB="0">
+                    <a:noFill/>
+                  </a:tcPr>
+                </a:tc>
+                <a:tc>
+                  <a:txBody>
+                    <a:bodyPr/>
+                    <a:lstStyle/>
+                    <a:p>
+                      <a:pPr algn="ctr">
+                        <a:buNone/>
+                      </a:pPr>
+                      <a:r>
+                        <a:rPr lang="es-ES" sz="900" dirty="0">
                           <a:effectLst/>
                           <a:latin typeface="Times New Roman" panose="02020603050405020304" pitchFamily="18" charset="0"/>
                           <a:ea typeface="Times New Roman" panose="02020603050405020304" pitchFamily="18" charset="0"/>
                           <a:cs typeface="Times New Roman" panose="02020603050405020304" pitchFamily="18" charset="0"/>
                         </a:rPr>
-                        <a:t>488.13</a:t>
-                      </a:r>
+                        <a:t>8.67</a:t>
+                      </a:r>
+                      <a:endParaRPr lang="de-DE" sz="900" dirty="0">
+                        <a:effectLst/>
+                        <a:latin typeface="Times New Roman" panose="02020603050405020304" pitchFamily="18" charset="0"/>
+                        <a:ea typeface="Times New Roman" panose="02020603050405020304" pitchFamily="18" charset="0"/>
+                        <a:cs typeface="Times New Roman" panose="02020603050405020304" pitchFamily="18" charset="0"/>
+                      </a:endParaRPr>
                     </a:p>
                   </a:txBody>
                   <a:tcPr marL="68580" marR="68580" marT="0" marB="0">
@@ -8559,38 +8649,6 @@
           </a:p>
         </p:txBody>
       </p:sp>
-      <p:pic>
-        <p:nvPicPr>
-          <p:cNvPr id="6" name="Onlinebild-Platzhalter 4">
-            <a:extLst>
-              <a:ext uri="{FF2B5EF4-FFF2-40B4-BE49-F238E27FC236}">
-                <a16:creationId xmlns:a16="http://schemas.microsoft.com/office/drawing/2014/main" id="{59AD2FCD-6DB5-A86D-4D5B-E3E125773A12}"/>
-              </a:ext>
-            </a:extLst>
-          </p:cNvPr>
-          <p:cNvPicPr>
-            <a:picLocks noGrp="1" noChangeAspect="1"/>
-          </p:cNvPicPr>
-          <p:nvPr>
-            <p:ph type="clipArt" sz="quarter" idx="15"/>
-          </p:nvPr>
-        </p:nvPicPr>
-        <p:blipFill>
-          <a:blip r:embed="rId2"/>
-          <a:stretch>
-            <a:fillRect/>
-          </a:stretch>
-        </p:blipFill>
-        <p:spPr>
-          <a:xfrm>
-            <a:off x="583920" y="2151063"/>
-            <a:ext cx="5239310" cy="4008437"/>
-          </a:xfrm>
-          <a:prstGeom prst="rect">
-            <a:avLst/>
-          </a:prstGeom>
-        </p:spPr>
-      </p:pic>
       <p:sp>
         <p:nvSpPr>
           <p:cNvPr id="4" name="Fußzeilenplatzhalter 2">
@@ -8720,6 +8778,38 @@
           </a:p>
         </p:txBody>
       </p:sp>
+      <p:pic>
+        <p:nvPicPr>
+          <p:cNvPr id="9" name="Onlinebild-Platzhalter 8">
+            <a:extLst>
+              <a:ext uri="{FF2B5EF4-FFF2-40B4-BE49-F238E27FC236}">
+                <a16:creationId xmlns:a16="http://schemas.microsoft.com/office/drawing/2014/main" id="{3C0309DE-9CF0-BCF5-4E45-EE26FEFD19D5}"/>
+              </a:ext>
+            </a:extLst>
+          </p:cNvPr>
+          <p:cNvPicPr>
+            <a:picLocks noGrp="1" noChangeAspect="1"/>
+          </p:cNvPicPr>
+          <p:nvPr>
+            <p:ph type="clipArt" sz="quarter" idx="15"/>
+          </p:nvPr>
+        </p:nvPicPr>
+        <p:blipFill>
+          <a:blip r:embed="rId2"/>
+          <a:stretch>
+            <a:fillRect/>
+          </a:stretch>
+        </p:blipFill>
+        <p:spPr>
+          <a:xfrm>
+            <a:off x="583920" y="2151063"/>
+            <a:ext cx="5239310" cy="4008437"/>
+          </a:xfrm>
+          <a:prstGeom prst="rect">
+            <a:avLst/>
+          </a:prstGeom>
+        </p:spPr>
+      </p:pic>
     </p:spTree>
     <p:extLst>
       <p:ext uri="{BB962C8B-B14F-4D97-AF65-F5344CB8AC3E}">
@@ -8810,7 +8900,7 @@
             <p:ph sz="quarter" idx="14"/>
             <p:extLst>
               <p:ext uri="{D42A27DB-BD31-4B8C-83A1-F6EECF244321}">
-                <p14:modId xmlns:p14="http://schemas.microsoft.com/office/powerpoint/2010/main" val="3817553019"/>
+                <p14:modId xmlns:p14="http://schemas.microsoft.com/office/powerpoint/2010/main" val="1945871986"/>
               </p:ext>
             </p:extLst>
           </p:nvPr>
@@ -10160,14 +10250,20 @@
                         <a:buNone/>
                       </a:pPr>
                       <a:r>
-                        <a:rPr lang="es-ES_tradnl" sz="900" dirty="0">
+                        <a:rPr lang="es-ES" sz="800">
                           <a:effectLst/>
                           <a:latin typeface="Times New Roman" panose="02020603050405020304" pitchFamily="18" charset="0"/>
                           <a:ea typeface="Times New Roman" panose="02020603050405020304" pitchFamily="18" charset="0"/>
                           <a:cs typeface="Times New Roman" panose="02020603050405020304" pitchFamily="18" charset="0"/>
                         </a:rPr>
-                        <a:t>161.01</a:t>
-                      </a:r>
+                        <a:t>6.00</a:t>
+                      </a:r>
+                      <a:endParaRPr lang="de-DE" sz="800">
+                        <a:effectLst/>
+                        <a:latin typeface="Times New Roman" panose="02020603050405020304" pitchFamily="18" charset="0"/>
+                        <a:ea typeface="Times New Roman" panose="02020603050405020304" pitchFamily="18" charset="0"/>
+                        <a:cs typeface="Times New Roman" panose="02020603050405020304" pitchFamily="18" charset="0"/>
+                      </a:endParaRPr>
                     </a:p>
                   </a:txBody>
                   <a:tcPr marL="68580" marR="68580" marT="0" marB="0">
@@ -10192,14 +10288,20 @@
                         <a:buNone/>
                       </a:pPr>
                       <a:r>
-                        <a:rPr lang="es-ES_tradnl" sz="900" dirty="0">
+                        <a:rPr lang="es-ES" sz="800">
                           <a:effectLst/>
                           <a:latin typeface="Times New Roman" panose="02020603050405020304" pitchFamily="18" charset="0"/>
                           <a:ea typeface="Times New Roman" panose="02020603050405020304" pitchFamily="18" charset="0"/>
                           <a:cs typeface="Times New Roman" panose="02020603050405020304" pitchFamily="18" charset="0"/>
                         </a:rPr>
-                        <a:t>23.60</a:t>
-                      </a:r>
+                        <a:t>1.44</a:t>
+                      </a:r>
+                      <a:endParaRPr lang="de-DE" sz="800">
+                        <a:effectLst/>
+                        <a:latin typeface="Times New Roman" panose="02020603050405020304" pitchFamily="18" charset="0"/>
+                        <a:ea typeface="Times New Roman" panose="02020603050405020304" pitchFamily="18" charset="0"/>
+                        <a:cs typeface="Times New Roman" panose="02020603050405020304" pitchFamily="18" charset="0"/>
+                      </a:endParaRPr>
                     </a:p>
                   </a:txBody>
                   <a:tcPr marL="68580" marR="68580" marT="0" marB="0">
@@ -10224,14 +10326,20 @@
                         <a:buNone/>
                       </a:pPr>
                       <a:r>
-                        <a:rPr lang="es-ES_tradnl" sz="900" dirty="0">
+                        <a:rPr lang="es-ES" sz="800">
                           <a:effectLst/>
                           <a:latin typeface="Times New Roman" panose="02020603050405020304" pitchFamily="18" charset="0"/>
                           <a:ea typeface="Times New Roman" panose="02020603050405020304" pitchFamily="18" charset="0"/>
                           <a:cs typeface="Times New Roman" panose="02020603050405020304" pitchFamily="18" charset="0"/>
                         </a:rPr>
-                        <a:t>147.62</a:t>
-                      </a:r>
+                        <a:t>7.10</a:t>
+                      </a:r>
+                      <a:endParaRPr lang="de-DE" sz="800">
+                        <a:effectLst/>
+                        <a:latin typeface="Times New Roman" panose="02020603050405020304" pitchFamily="18" charset="0"/>
+                        <a:ea typeface="Times New Roman" panose="02020603050405020304" pitchFamily="18" charset="0"/>
+                        <a:cs typeface="Times New Roman" panose="02020603050405020304" pitchFamily="18" charset="0"/>
+                      </a:endParaRPr>
                     </a:p>
                   </a:txBody>
                   <a:tcPr marL="68580" marR="68580" marT="0" marB="0">
@@ -10256,14 +10364,20 @@
                         <a:buNone/>
                       </a:pPr>
                       <a:r>
-                        <a:rPr lang="es-ES_tradnl" sz="900" dirty="0">
+                        <a:rPr lang="es-ES" sz="800">
                           <a:effectLst/>
                           <a:latin typeface="Times New Roman" panose="02020603050405020304" pitchFamily="18" charset="0"/>
                           <a:ea typeface="Times New Roman" panose="02020603050405020304" pitchFamily="18" charset="0"/>
                           <a:cs typeface="Times New Roman" panose="02020603050405020304" pitchFamily="18" charset="0"/>
                         </a:rPr>
-                        <a:t>3.21</a:t>
-                      </a:r>
+                        <a:t>3.22</a:t>
+                      </a:r>
+                      <a:endParaRPr lang="de-DE" sz="800">
+                        <a:effectLst/>
+                        <a:latin typeface="Times New Roman" panose="02020603050405020304" pitchFamily="18" charset="0"/>
+                        <a:ea typeface="Times New Roman" panose="02020603050405020304" pitchFamily="18" charset="0"/>
+                        <a:cs typeface="Times New Roman" panose="02020603050405020304" pitchFamily="18" charset="0"/>
+                      </a:endParaRPr>
                     </a:p>
                   </a:txBody>
                   <a:tcPr marL="68580" marR="68580" marT="0" marB="0">
@@ -10288,14 +10402,20 @@
                         <a:buNone/>
                       </a:pPr>
                       <a:r>
-                        <a:rPr lang="es-ES_tradnl" sz="900" dirty="0">
+                        <a:rPr lang="es-ES" sz="800">
                           <a:effectLst/>
                           <a:latin typeface="Times New Roman" panose="02020603050405020304" pitchFamily="18" charset="0"/>
                           <a:ea typeface="Times New Roman" panose="02020603050405020304" pitchFamily="18" charset="0"/>
                           <a:cs typeface="Times New Roman" panose="02020603050405020304" pitchFamily="18" charset="0"/>
                         </a:rPr>
-                        <a:t>163.67</a:t>
-                      </a:r>
+                        <a:t>7.76</a:t>
+                      </a:r>
+                      <a:endParaRPr lang="de-DE" sz="800">
+                        <a:effectLst/>
+                        <a:latin typeface="Times New Roman" panose="02020603050405020304" pitchFamily="18" charset="0"/>
+                        <a:ea typeface="Times New Roman" panose="02020603050405020304" pitchFamily="18" charset="0"/>
+                        <a:cs typeface="Times New Roman" panose="02020603050405020304" pitchFamily="18" charset="0"/>
+                      </a:endParaRPr>
                     </a:p>
                   </a:txBody>
                   <a:tcPr marL="68580" marR="68580" marT="0" marB="0">
@@ -10583,106 +10703,136 @@
                         <a:buNone/>
                       </a:pPr>
                       <a:r>
-                        <a:rPr lang="es-ES_tradnl" sz="900" dirty="0">
+                        <a:rPr lang="es-ES" sz="800">
                           <a:effectLst/>
                           <a:latin typeface="Times New Roman" panose="02020603050405020304" pitchFamily="18" charset="0"/>
                           <a:ea typeface="Times New Roman" panose="02020603050405020304" pitchFamily="18" charset="0"/>
                           <a:cs typeface="Times New Roman" panose="02020603050405020304" pitchFamily="18" charset="0"/>
                         </a:rPr>
-                        <a:t>161.01</a:t>
-                      </a:r>
-                    </a:p>
-                  </a:txBody>
-                  <a:tcPr marL="68580" marR="68580" marT="0" marB="0">
-                    <a:noFill/>
-                  </a:tcPr>
-                </a:tc>
-                <a:tc>
-                  <a:txBody>
-                    <a:bodyPr/>
-                    <a:lstStyle/>
-                    <a:p>
-                      <a:pPr algn="ctr">
-                        <a:buNone/>
-                      </a:pPr>
-                      <a:r>
-                        <a:rPr lang="es-ES_tradnl" sz="900" dirty="0">
+                        <a:t>6.00</a:t>
+                      </a:r>
+                      <a:endParaRPr lang="de-DE" sz="800">
+                        <a:effectLst/>
+                        <a:latin typeface="Times New Roman" panose="02020603050405020304" pitchFamily="18" charset="0"/>
+                        <a:ea typeface="Times New Roman" panose="02020603050405020304" pitchFamily="18" charset="0"/>
+                        <a:cs typeface="Times New Roman" panose="02020603050405020304" pitchFamily="18" charset="0"/>
+                      </a:endParaRPr>
+                    </a:p>
+                  </a:txBody>
+                  <a:tcPr marL="68580" marR="68580" marT="0" marB="0">
+                    <a:noFill/>
+                  </a:tcPr>
+                </a:tc>
+                <a:tc>
+                  <a:txBody>
+                    <a:bodyPr/>
+                    <a:lstStyle/>
+                    <a:p>
+                      <a:pPr algn="ctr">
+                        <a:buNone/>
+                      </a:pPr>
+                      <a:r>
+                        <a:rPr lang="es-ES" sz="800">
                           <a:effectLst/>
                           <a:latin typeface="Times New Roman" panose="02020603050405020304" pitchFamily="18" charset="0"/>
                           <a:ea typeface="Times New Roman" panose="02020603050405020304" pitchFamily="18" charset="0"/>
                           <a:cs typeface="Times New Roman" panose="02020603050405020304" pitchFamily="18" charset="0"/>
                         </a:rPr>
-                        <a:t>24.37</a:t>
-                      </a:r>
-                    </a:p>
-                  </a:txBody>
-                  <a:tcPr marL="68580" marR="68580" marT="0" marB="0">
-                    <a:noFill/>
-                  </a:tcPr>
-                </a:tc>
-                <a:tc>
-                  <a:txBody>
-                    <a:bodyPr/>
-                    <a:lstStyle/>
-                    <a:p>
-                      <a:pPr algn="ctr">
-                        <a:buNone/>
-                      </a:pPr>
-                      <a:r>
-                        <a:rPr lang="es-ES_tradnl" sz="900" dirty="0">
+                        <a:t>1.58</a:t>
+                      </a:r>
+                      <a:endParaRPr lang="de-DE" sz="800">
+                        <a:effectLst/>
+                        <a:latin typeface="Times New Roman" panose="02020603050405020304" pitchFamily="18" charset="0"/>
+                        <a:ea typeface="Times New Roman" panose="02020603050405020304" pitchFamily="18" charset="0"/>
+                        <a:cs typeface="Times New Roman" panose="02020603050405020304" pitchFamily="18" charset="0"/>
+                      </a:endParaRPr>
+                    </a:p>
+                  </a:txBody>
+                  <a:tcPr marL="68580" marR="68580" marT="0" marB="0">
+                    <a:noFill/>
+                  </a:tcPr>
+                </a:tc>
+                <a:tc>
+                  <a:txBody>
+                    <a:bodyPr/>
+                    <a:lstStyle/>
+                    <a:p>
+                      <a:pPr algn="ctr">
+                        <a:buNone/>
+                      </a:pPr>
+                      <a:r>
+                        <a:rPr lang="es-ES" sz="800">
                           <a:effectLst/>
                           <a:latin typeface="Times New Roman" panose="02020603050405020304" pitchFamily="18" charset="0"/>
                           <a:ea typeface="Times New Roman" panose="02020603050405020304" pitchFamily="18" charset="0"/>
                           <a:cs typeface="Times New Roman" panose="02020603050405020304" pitchFamily="18" charset="0"/>
                         </a:rPr>
-                        <a:t>148.22</a:t>
-                      </a:r>
-                    </a:p>
-                  </a:txBody>
-                  <a:tcPr marL="68580" marR="68580" marT="0" marB="0">
-                    <a:noFill/>
-                  </a:tcPr>
-                </a:tc>
-                <a:tc>
-                  <a:txBody>
-                    <a:bodyPr/>
-                    <a:lstStyle/>
-                    <a:p>
-                      <a:pPr algn="ctr">
-                        <a:buNone/>
-                      </a:pPr>
-                      <a:r>
-                        <a:rPr lang="es-ES_tradnl" sz="900" dirty="0">
+                        <a:t>7.19</a:t>
+                      </a:r>
+                      <a:endParaRPr lang="de-DE" sz="800">
+                        <a:effectLst/>
+                        <a:latin typeface="Times New Roman" panose="02020603050405020304" pitchFamily="18" charset="0"/>
+                        <a:ea typeface="Times New Roman" panose="02020603050405020304" pitchFamily="18" charset="0"/>
+                        <a:cs typeface="Times New Roman" panose="02020603050405020304" pitchFamily="18" charset="0"/>
+                      </a:endParaRPr>
+                    </a:p>
+                  </a:txBody>
+                  <a:tcPr marL="68580" marR="68580" marT="0" marB="0">
+                    <a:noFill/>
+                  </a:tcPr>
+                </a:tc>
+                <a:tc>
+                  <a:txBody>
+                    <a:bodyPr/>
+                    <a:lstStyle/>
+                    <a:p>
+                      <a:pPr algn="ctr">
+                        <a:buNone/>
+                      </a:pPr>
+                      <a:r>
+                        <a:rPr lang="es-ES" sz="800">
                           <a:effectLst/>
                           <a:latin typeface="Times New Roman" panose="02020603050405020304" pitchFamily="18" charset="0"/>
                           <a:ea typeface="Times New Roman" panose="02020603050405020304" pitchFamily="18" charset="0"/>
                           <a:cs typeface="Times New Roman" panose="02020603050405020304" pitchFamily="18" charset="0"/>
                         </a:rPr>
-                        <a:t>3.16</a:t>
-                      </a:r>
-                    </a:p>
-                  </a:txBody>
-                  <a:tcPr marL="68580" marR="68580" marT="0" marB="0">
-                    <a:noFill/>
-                  </a:tcPr>
-                </a:tc>
-                <a:tc>
-                  <a:txBody>
-                    <a:bodyPr/>
-                    <a:lstStyle/>
-                    <a:p>
-                      <a:pPr algn="ctr">
-                        <a:buNone/>
-                      </a:pPr>
-                      <a:r>
-                        <a:rPr lang="es-ES_tradnl" sz="900" dirty="0">
+                        <a:t>3.11</a:t>
+                      </a:r>
+                      <a:endParaRPr lang="de-DE" sz="800">
+                        <a:effectLst/>
+                        <a:latin typeface="Times New Roman" panose="02020603050405020304" pitchFamily="18" charset="0"/>
+                        <a:ea typeface="Times New Roman" panose="02020603050405020304" pitchFamily="18" charset="0"/>
+                        <a:cs typeface="Times New Roman" panose="02020603050405020304" pitchFamily="18" charset="0"/>
+                      </a:endParaRPr>
+                    </a:p>
+                  </a:txBody>
+                  <a:tcPr marL="68580" marR="68580" marT="0" marB="0">
+                    <a:noFill/>
+                  </a:tcPr>
+                </a:tc>
+                <a:tc>
+                  <a:txBody>
+                    <a:bodyPr/>
+                    <a:lstStyle/>
+                    <a:p>
+                      <a:pPr algn="ctr">
+                        <a:buNone/>
+                      </a:pPr>
+                      <a:r>
+                        <a:rPr lang="es-ES" sz="800">
                           <a:effectLst/>
                           <a:latin typeface="Times New Roman" panose="02020603050405020304" pitchFamily="18" charset="0"/>
                           <a:ea typeface="Times New Roman" panose="02020603050405020304" pitchFamily="18" charset="0"/>
                           <a:cs typeface="Times New Roman" panose="02020603050405020304" pitchFamily="18" charset="0"/>
                         </a:rPr>
-                        <a:t>163.23</a:t>
-                      </a:r>
+                        <a:t>8.37</a:t>
+                      </a:r>
+                      <a:endParaRPr lang="de-DE" sz="800">
+                        <a:effectLst/>
+                        <a:latin typeface="Times New Roman" panose="02020603050405020304" pitchFamily="18" charset="0"/>
+                        <a:ea typeface="Times New Roman" panose="02020603050405020304" pitchFamily="18" charset="0"/>
+                        <a:cs typeface="Times New Roman" panose="02020603050405020304" pitchFamily="18" charset="0"/>
+                      </a:endParaRPr>
                     </a:p>
                   </a:txBody>
                   <a:tcPr marL="68580" marR="68580" marT="0" marB="0">
@@ -10961,106 +11111,136 @@
                         <a:buNone/>
                       </a:pPr>
                       <a:r>
-                        <a:rPr lang="es-ES_tradnl" sz="900" dirty="0">
+                        <a:rPr lang="es-ES" sz="800">
                           <a:effectLst/>
                           <a:latin typeface="Times New Roman" panose="02020603050405020304" pitchFamily="18" charset="0"/>
                           <a:ea typeface="Times New Roman" panose="02020603050405020304" pitchFamily="18" charset="0"/>
                           <a:cs typeface="Times New Roman" panose="02020603050405020304" pitchFamily="18" charset="0"/>
                         </a:rPr>
-                        <a:t>161.01</a:t>
-                      </a:r>
-                    </a:p>
-                  </a:txBody>
-                  <a:tcPr marL="68580" marR="68580" marT="0" marB="0">
-                    <a:noFill/>
-                  </a:tcPr>
-                </a:tc>
-                <a:tc>
-                  <a:txBody>
-                    <a:bodyPr/>
-                    <a:lstStyle/>
-                    <a:p>
-                      <a:pPr algn="ctr">
-                        <a:buNone/>
-                      </a:pPr>
-                      <a:r>
-                        <a:rPr lang="es-ES_tradnl" sz="900" dirty="0">
+                        <a:t>6.00</a:t>
+                      </a:r>
+                      <a:endParaRPr lang="de-DE" sz="800">
+                        <a:effectLst/>
+                        <a:latin typeface="Times New Roman" panose="02020603050405020304" pitchFamily="18" charset="0"/>
+                        <a:ea typeface="Times New Roman" panose="02020603050405020304" pitchFamily="18" charset="0"/>
+                        <a:cs typeface="Times New Roman" panose="02020603050405020304" pitchFamily="18" charset="0"/>
+                      </a:endParaRPr>
+                    </a:p>
+                  </a:txBody>
+                  <a:tcPr marL="68580" marR="68580" marT="0" marB="0">
+                    <a:noFill/>
+                  </a:tcPr>
+                </a:tc>
+                <a:tc>
+                  <a:txBody>
+                    <a:bodyPr/>
+                    <a:lstStyle/>
+                    <a:p>
+                      <a:pPr algn="ctr">
+                        <a:buNone/>
+                      </a:pPr>
+                      <a:r>
+                        <a:rPr lang="es-ES" sz="800">
                           <a:effectLst/>
                           <a:latin typeface="Times New Roman" panose="02020603050405020304" pitchFamily="18" charset="0"/>
                           <a:ea typeface="Times New Roman" panose="02020603050405020304" pitchFamily="18" charset="0"/>
                           <a:cs typeface="Times New Roman" panose="02020603050405020304" pitchFamily="18" charset="0"/>
                         </a:rPr>
-                        <a:t>24.15</a:t>
-                      </a:r>
-                    </a:p>
-                  </a:txBody>
-                  <a:tcPr marL="68580" marR="68580" marT="0" marB="0">
-                    <a:noFill/>
-                  </a:tcPr>
-                </a:tc>
-                <a:tc>
-                  <a:txBody>
-                    <a:bodyPr/>
-                    <a:lstStyle/>
-                    <a:p>
-                      <a:pPr algn="ctr">
-                        <a:buNone/>
-                      </a:pPr>
-                      <a:r>
-                        <a:rPr lang="es-ES_tradnl" sz="900" dirty="0">
+                        <a:t>1.60</a:t>
+                      </a:r>
+                      <a:endParaRPr lang="de-DE" sz="800">
+                        <a:effectLst/>
+                        <a:latin typeface="Times New Roman" panose="02020603050405020304" pitchFamily="18" charset="0"/>
+                        <a:ea typeface="Times New Roman" panose="02020603050405020304" pitchFamily="18" charset="0"/>
+                        <a:cs typeface="Times New Roman" panose="02020603050405020304" pitchFamily="18" charset="0"/>
+                      </a:endParaRPr>
+                    </a:p>
+                  </a:txBody>
+                  <a:tcPr marL="68580" marR="68580" marT="0" marB="0">
+                    <a:noFill/>
+                  </a:tcPr>
+                </a:tc>
+                <a:tc>
+                  <a:txBody>
+                    <a:bodyPr/>
+                    <a:lstStyle/>
+                    <a:p>
+                      <a:pPr algn="ctr">
+                        <a:buNone/>
+                      </a:pPr>
+                      <a:r>
+                        <a:rPr lang="es-ES" sz="800">
                           <a:effectLst/>
                           <a:latin typeface="Times New Roman" panose="02020603050405020304" pitchFamily="18" charset="0"/>
                           <a:ea typeface="Times New Roman" panose="02020603050405020304" pitchFamily="18" charset="0"/>
                           <a:cs typeface="Times New Roman" panose="02020603050405020304" pitchFamily="18" charset="0"/>
                         </a:rPr>
-                        <a:t>148.06</a:t>
-                      </a:r>
-                    </a:p>
-                  </a:txBody>
-                  <a:tcPr marL="68580" marR="68580" marT="0" marB="0">
-                    <a:noFill/>
-                  </a:tcPr>
-                </a:tc>
-                <a:tc>
-                  <a:txBody>
-                    <a:bodyPr/>
-                    <a:lstStyle/>
-                    <a:p>
-                      <a:pPr algn="ctr">
-                        <a:buNone/>
-                      </a:pPr>
-                      <a:r>
-                        <a:rPr lang="es-ES_tradnl" sz="900" dirty="0">
+                        <a:t>7.14</a:t>
+                      </a:r>
+                      <a:endParaRPr lang="de-DE" sz="800">
+                        <a:effectLst/>
+                        <a:latin typeface="Times New Roman" panose="02020603050405020304" pitchFamily="18" charset="0"/>
+                        <a:ea typeface="Times New Roman" panose="02020603050405020304" pitchFamily="18" charset="0"/>
+                        <a:cs typeface="Times New Roman" panose="02020603050405020304" pitchFamily="18" charset="0"/>
+                      </a:endParaRPr>
+                    </a:p>
+                  </a:txBody>
+                  <a:tcPr marL="68580" marR="68580" marT="0" marB="0">
+                    <a:noFill/>
+                  </a:tcPr>
+                </a:tc>
+                <a:tc>
+                  <a:txBody>
+                    <a:bodyPr/>
+                    <a:lstStyle/>
+                    <a:p>
+                      <a:pPr algn="ctr">
+                        <a:buNone/>
+                      </a:pPr>
+                      <a:r>
+                        <a:rPr lang="es-ES" sz="800">
                           <a:effectLst/>
                           <a:latin typeface="Times New Roman" panose="02020603050405020304" pitchFamily="18" charset="0"/>
                           <a:ea typeface="Times New Roman" panose="02020603050405020304" pitchFamily="18" charset="0"/>
                           <a:cs typeface="Times New Roman" panose="02020603050405020304" pitchFamily="18" charset="0"/>
                         </a:rPr>
-                        <a:t>3.31</a:t>
-                      </a:r>
-                    </a:p>
-                  </a:txBody>
-                  <a:tcPr marL="68580" marR="68580" marT="0" marB="0">
-                    <a:noFill/>
-                  </a:tcPr>
-                </a:tc>
-                <a:tc>
-                  <a:txBody>
-                    <a:bodyPr/>
-                    <a:lstStyle/>
-                    <a:p>
-                      <a:pPr algn="ctr">
-                        <a:buNone/>
-                      </a:pPr>
-                      <a:r>
-                        <a:rPr lang="es-ES_tradnl" sz="900" dirty="0">
+                        <a:t>3.28</a:t>
+                      </a:r>
+                      <a:endParaRPr lang="de-DE" sz="800">
+                        <a:effectLst/>
+                        <a:latin typeface="Times New Roman" panose="02020603050405020304" pitchFamily="18" charset="0"/>
+                        <a:ea typeface="Times New Roman" panose="02020603050405020304" pitchFamily="18" charset="0"/>
+                        <a:cs typeface="Times New Roman" panose="02020603050405020304" pitchFamily="18" charset="0"/>
+                      </a:endParaRPr>
+                    </a:p>
+                  </a:txBody>
+                  <a:tcPr marL="68580" marR="68580" marT="0" marB="0">
+                    <a:noFill/>
+                  </a:tcPr>
+                </a:tc>
+                <a:tc>
+                  <a:txBody>
+                    <a:bodyPr/>
+                    <a:lstStyle/>
+                    <a:p>
+                      <a:pPr algn="ctr">
+                        <a:buNone/>
+                      </a:pPr>
+                      <a:r>
+                        <a:rPr lang="es-ES" sz="800" dirty="0">
                           <a:effectLst/>
                           <a:latin typeface="Times New Roman" panose="02020603050405020304" pitchFamily="18" charset="0"/>
                           <a:ea typeface="Times New Roman" panose="02020603050405020304" pitchFamily="18" charset="0"/>
                           <a:cs typeface="Times New Roman" panose="02020603050405020304" pitchFamily="18" charset="0"/>
                         </a:rPr>
-                        <a:t>163.24</a:t>
-                      </a:r>
+                        <a:t>9.78</a:t>
+                      </a:r>
+                      <a:endParaRPr lang="de-DE" sz="800" dirty="0">
+                        <a:effectLst/>
+                        <a:latin typeface="Times New Roman" panose="02020603050405020304" pitchFamily="18" charset="0"/>
+                        <a:ea typeface="Times New Roman" panose="02020603050405020304" pitchFamily="18" charset="0"/>
+                        <a:cs typeface="Times New Roman" panose="02020603050405020304" pitchFamily="18" charset="0"/>
+                      </a:endParaRPr>
                     </a:p>
                   </a:txBody>
                   <a:tcPr marL="68580" marR="68580" marT="0" marB="0">
@@ -12135,38 +12315,6 @@
           </a:p>
         </p:txBody>
       </p:sp>
-      <p:pic>
-        <p:nvPicPr>
-          <p:cNvPr id="6" name="Onlinebild-Platzhalter 5">
-            <a:extLst>
-              <a:ext uri="{FF2B5EF4-FFF2-40B4-BE49-F238E27FC236}">
-                <a16:creationId xmlns:a16="http://schemas.microsoft.com/office/drawing/2014/main" id="{E1863E05-5731-DFE6-6741-64E77FCC8ED6}"/>
-              </a:ext>
-            </a:extLst>
-          </p:cNvPr>
-          <p:cNvPicPr>
-            <a:picLocks noGrp="1" noChangeAspect="1"/>
-          </p:cNvPicPr>
-          <p:nvPr>
-            <p:ph type="clipArt" sz="quarter" idx="15"/>
-          </p:nvPr>
-        </p:nvPicPr>
-        <p:blipFill>
-          <a:blip r:embed="rId2"/>
-          <a:stretch>
-            <a:fillRect/>
-          </a:stretch>
-        </p:blipFill>
-        <p:spPr>
-          <a:xfrm>
-            <a:off x="617249" y="2151063"/>
-            <a:ext cx="5172652" cy="4008437"/>
-          </a:xfrm>
-          <a:prstGeom prst="rect">
-            <a:avLst/>
-          </a:prstGeom>
-        </p:spPr>
-      </p:pic>
       <p:sp>
         <p:nvSpPr>
           <p:cNvPr id="4" name="Fußzeilenplatzhalter 2">
@@ -12296,6 +12444,38 @@
           </a:p>
         </p:txBody>
       </p:sp>
+      <p:pic>
+        <p:nvPicPr>
+          <p:cNvPr id="9" name="Onlinebild-Platzhalter 8">
+            <a:extLst>
+              <a:ext uri="{FF2B5EF4-FFF2-40B4-BE49-F238E27FC236}">
+                <a16:creationId xmlns:a16="http://schemas.microsoft.com/office/drawing/2014/main" id="{1DA97868-464C-57E2-77B6-347E2BBEB4D4}"/>
+              </a:ext>
+            </a:extLst>
+          </p:cNvPr>
+          <p:cNvPicPr>
+            <a:picLocks noGrp="1" noChangeAspect="1"/>
+          </p:cNvPicPr>
+          <p:nvPr>
+            <p:ph type="clipArt" sz="quarter" idx="15"/>
+          </p:nvPr>
+        </p:nvPicPr>
+        <p:blipFill>
+          <a:blip r:embed="rId2"/>
+          <a:stretch>
+            <a:fillRect/>
+          </a:stretch>
+        </p:blipFill>
+        <p:spPr>
+          <a:xfrm>
+            <a:off x="583920" y="2151063"/>
+            <a:ext cx="5239310" cy="4008437"/>
+          </a:xfrm>
+          <a:prstGeom prst="rect">
+            <a:avLst/>
+          </a:prstGeom>
+        </p:spPr>
+      </p:pic>
     </p:spTree>
     <p:extLst>
       <p:ext uri="{BB962C8B-B14F-4D97-AF65-F5344CB8AC3E}">
@@ -12393,7 +12573,7 @@
             <p:ph sz="quarter" idx="14"/>
             <p:extLst>
               <p:ext uri="{D42A27DB-BD31-4B8C-83A1-F6EECF244321}">
-                <p14:modId xmlns:p14="http://schemas.microsoft.com/office/powerpoint/2010/main" val="2004895586"/>
+                <p14:modId xmlns:p14="http://schemas.microsoft.com/office/powerpoint/2010/main" val="3870258421"/>
               </p:ext>
             </p:extLst>
           </p:nvPr>
@@ -13743,14 +13923,20 @@
                         <a:buNone/>
                       </a:pPr>
                       <a:r>
-                        <a:rPr lang="es-ES_tradnl" sz="900" dirty="0">
+                        <a:rPr lang="es-ES" sz="900">
                           <a:effectLst/>
                           <a:latin typeface="Times New Roman" panose="02020603050405020304" pitchFamily="18" charset="0"/>
                           <a:ea typeface="Times New Roman" panose="02020603050405020304" pitchFamily="18" charset="0"/>
                           <a:cs typeface="Times New Roman" panose="02020603050405020304" pitchFamily="18" charset="0"/>
                         </a:rPr>
-                        <a:t>161.01</a:t>
-                      </a:r>
+                        <a:t>6.00</a:t>
+                      </a:r>
+                      <a:endParaRPr lang="de-DE" sz="900">
+                        <a:effectLst/>
+                        <a:latin typeface="Times New Roman" panose="02020603050405020304" pitchFamily="18" charset="0"/>
+                        <a:ea typeface="Times New Roman" panose="02020603050405020304" pitchFamily="18" charset="0"/>
+                        <a:cs typeface="Times New Roman" panose="02020603050405020304" pitchFamily="18" charset="0"/>
+                      </a:endParaRPr>
                     </a:p>
                   </a:txBody>
                   <a:tcPr marL="68580" marR="68580" marT="0" marB="0">
@@ -13775,14 +13961,20 @@
                         <a:buNone/>
                       </a:pPr>
                       <a:r>
-                        <a:rPr lang="es-ES_tradnl" sz="900" dirty="0">
+                        <a:rPr lang="es-ES" sz="900">
                           <a:effectLst/>
                           <a:latin typeface="Times New Roman" panose="02020603050405020304" pitchFamily="18" charset="0"/>
                           <a:ea typeface="Times New Roman" panose="02020603050405020304" pitchFamily="18" charset="0"/>
                           <a:cs typeface="Times New Roman" panose="02020603050405020304" pitchFamily="18" charset="0"/>
                         </a:rPr>
-                        <a:t>27.04</a:t>
-                      </a:r>
+                        <a:t>1.52</a:t>
+                      </a:r>
+                      <a:endParaRPr lang="de-DE" sz="900">
+                        <a:effectLst/>
+                        <a:latin typeface="Times New Roman" panose="02020603050405020304" pitchFamily="18" charset="0"/>
+                        <a:ea typeface="Times New Roman" panose="02020603050405020304" pitchFamily="18" charset="0"/>
+                        <a:cs typeface="Times New Roman" panose="02020603050405020304" pitchFamily="18" charset="0"/>
+                      </a:endParaRPr>
                     </a:p>
                   </a:txBody>
                   <a:tcPr marL="68580" marR="68580" marT="0" marB="0">
@@ -13807,14 +13999,20 @@
                         <a:buNone/>
                       </a:pPr>
                       <a:r>
-                        <a:rPr lang="es-ES_tradnl" sz="900" dirty="0">
+                        <a:rPr lang="es-ES" sz="900">
                           <a:effectLst/>
                           <a:latin typeface="Times New Roman" panose="02020603050405020304" pitchFamily="18" charset="0"/>
                           <a:ea typeface="Times New Roman" panose="02020603050405020304" pitchFamily="18" charset="0"/>
                           <a:cs typeface="Times New Roman" panose="02020603050405020304" pitchFamily="18" charset="0"/>
                         </a:rPr>
-                        <a:t>138.73</a:t>
-                      </a:r>
+                        <a:t>4.59</a:t>
+                      </a:r>
+                      <a:endParaRPr lang="de-DE" sz="900">
+                        <a:effectLst/>
+                        <a:latin typeface="Times New Roman" panose="02020603050405020304" pitchFamily="18" charset="0"/>
+                        <a:ea typeface="Times New Roman" panose="02020603050405020304" pitchFamily="18" charset="0"/>
+                        <a:cs typeface="Times New Roman" panose="02020603050405020304" pitchFamily="18" charset="0"/>
+                      </a:endParaRPr>
                     </a:p>
                   </a:txBody>
                   <a:tcPr marL="68580" marR="68580" marT="0" marB="0">
@@ -13839,14 +14037,20 @@
                         <a:buNone/>
                       </a:pPr>
                       <a:r>
-                        <a:rPr lang="es-ES_tradnl" sz="900" dirty="0">
+                        <a:rPr lang="es-ES" sz="900">
                           <a:effectLst/>
                           <a:latin typeface="Times New Roman" panose="02020603050405020304" pitchFamily="18" charset="0"/>
                           <a:ea typeface="Times New Roman" panose="02020603050405020304" pitchFamily="18" charset="0"/>
                           <a:cs typeface="Times New Roman" panose="02020603050405020304" pitchFamily="18" charset="0"/>
                         </a:rPr>
-                        <a:t>3.05</a:t>
-                      </a:r>
+                        <a:t>1.78</a:t>
+                      </a:r>
+                      <a:endParaRPr lang="de-DE" sz="900">
+                        <a:effectLst/>
+                        <a:latin typeface="Times New Roman" panose="02020603050405020304" pitchFamily="18" charset="0"/>
+                        <a:ea typeface="Times New Roman" panose="02020603050405020304" pitchFamily="18" charset="0"/>
+                        <a:cs typeface="Times New Roman" panose="02020603050405020304" pitchFamily="18" charset="0"/>
+                      </a:endParaRPr>
                     </a:p>
                   </a:txBody>
                   <a:tcPr marL="68580" marR="68580" marT="0" marB="0">
@@ -13871,14 +14075,20 @@
                         <a:buNone/>
                       </a:pPr>
                       <a:r>
-                        <a:rPr lang="es-ES_tradnl" sz="900" dirty="0">
+                        <a:rPr lang="es-ES" sz="900">
                           <a:effectLst/>
                           <a:latin typeface="Times New Roman" panose="02020603050405020304" pitchFamily="18" charset="0"/>
                           <a:ea typeface="Times New Roman" panose="02020603050405020304" pitchFamily="18" charset="0"/>
                           <a:cs typeface="Times New Roman" panose="02020603050405020304" pitchFamily="18" charset="0"/>
                         </a:rPr>
-                        <a:t>172.59</a:t>
-                      </a:r>
+                        <a:t>11.51</a:t>
+                      </a:r>
+                      <a:endParaRPr lang="de-DE" sz="900">
+                        <a:effectLst/>
+                        <a:latin typeface="Times New Roman" panose="02020603050405020304" pitchFamily="18" charset="0"/>
+                        <a:ea typeface="Times New Roman" panose="02020603050405020304" pitchFamily="18" charset="0"/>
+                        <a:cs typeface="Times New Roman" panose="02020603050405020304" pitchFamily="18" charset="0"/>
+                      </a:endParaRPr>
                     </a:p>
                   </a:txBody>
                   <a:tcPr marL="68580" marR="68580" marT="0" marB="0">
@@ -14166,106 +14376,136 @@
                         <a:buNone/>
                       </a:pPr>
                       <a:r>
-                        <a:rPr lang="es-ES_tradnl" sz="900" dirty="0">
+                        <a:rPr lang="es-ES" sz="900">
                           <a:effectLst/>
                           <a:latin typeface="Times New Roman" panose="02020603050405020304" pitchFamily="18" charset="0"/>
                           <a:ea typeface="Times New Roman" panose="02020603050405020304" pitchFamily="18" charset="0"/>
                           <a:cs typeface="Times New Roman" panose="02020603050405020304" pitchFamily="18" charset="0"/>
                         </a:rPr>
-                        <a:t>161.01</a:t>
-                      </a:r>
-                    </a:p>
-                  </a:txBody>
-                  <a:tcPr marL="68580" marR="68580" marT="0" marB="0">
-                    <a:noFill/>
-                  </a:tcPr>
-                </a:tc>
-                <a:tc>
-                  <a:txBody>
-                    <a:bodyPr/>
-                    <a:lstStyle/>
-                    <a:p>
-                      <a:pPr algn="ctr">
-                        <a:buNone/>
-                      </a:pPr>
-                      <a:r>
-                        <a:rPr lang="es-ES_tradnl" sz="900" dirty="0">
+                        <a:t>6.00</a:t>
+                      </a:r>
+                      <a:endParaRPr lang="de-DE" sz="900">
+                        <a:effectLst/>
+                        <a:latin typeface="Times New Roman" panose="02020603050405020304" pitchFamily="18" charset="0"/>
+                        <a:ea typeface="Times New Roman" panose="02020603050405020304" pitchFamily="18" charset="0"/>
+                        <a:cs typeface="Times New Roman" panose="02020603050405020304" pitchFamily="18" charset="0"/>
+                      </a:endParaRPr>
+                    </a:p>
+                  </a:txBody>
+                  <a:tcPr marL="68580" marR="68580" marT="0" marB="0">
+                    <a:noFill/>
+                  </a:tcPr>
+                </a:tc>
+                <a:tc>
+                  <a:txBody>
+                    <a:bodyPr/>
+                    <a:lstStyle/>
+                    <a:p>
+                      <a:pPr algn="ctr">
+                        <a:buNone/>
+                      </a:pPr>
+                      <a:r>
+                        <a:rPr lang="es-ES" sz="900">
                           <a:effectLst/>
                           <a:latin typeface="Times New Roman" panose="02020603050405020304" pitchFamily="18" charset="0"/>
                           <a:ea typeface="Times New Roman" panose="02020603050405020304" pitchFamily="18" charset="0"/>
                           <a:cs typeface="Times New Roman" panose="02020603050405020304" pitchFamily="18" charset="0"/>
                         </a:rPr>
-                        <a:t>23.60</a:t>
-                      </a:r>
-                    </a:p>
-                  </a:txBody>
-                  <a:tcPr marL="68580" marR="68580" marT="0" marB="0">
-                    <a:noFill/>
-                  </a:tcPr>
-                </a:tc>
-                <a:tc>
-                  <a:txBody>
-                    <a:bodyPr/>
-                    <a:lstStyle/>
-                    <a:p>
-                      <a:pPr algn="ctr">
-                        <a:buNone/>
-                      </a:pPr>
-                      <a:r>
-                        <a:rPr lang="es-ES_tradnl" sz="900" dirty="0">
+                        <a:t>1.44</a:t>
+                      </a:r>
+                      <a:endParaRPr lang="de-DE" sz="900">
+                        <a:effectLst/>
+                        <a:latin typeface="Times New Roman" panose="02020603050405020304" pitchFamily="18" charset="0"/>
+                        <a:ea typeface="Times New Roman" panose="02020603050405020304" pitchFamily="18" charset="0"/>
+                        <a:cs typeface="Times New Roman" panose="02020603050405020304" pitchFamily="18" charset="0"/>
+                      </a:endParaRPr>
+                    </a:p>
+                  </a:txBody>
+                  <a:tcPr marL="68580" marR="68580" marT="0" marB="0">
+                    <a:noFill/>
+                  </a:tcPr>
+                </a:tc>
+                <a:tc>
+                  <a:txBody>
+                    <a:bodyPr/>
+                    <a:lstStyle/>
+                    <a:p>
+                      <a:pPr algn="ctr">
+                        <a:buNone/>
+                      </a:pPr>
+                      <a:r>
+                        <a:rPr lang="es-ES" sz="900">
                           <a:effectLst/>
                           <a:latin typeface="Times New Roman" panose="02020603050405020304" pitchFamily="18" charset="0"/>
                           <a:ea typeface="Times New Roman" panose="02020603050405020304" pitchFamily="18" charset="0"/>
                           <a:cs typeface="Times New Roman" panose="02020603050405020304" pitchFamily="18" charset="0"/>
                         </a:rPr>
-                        <a:t>147.62</a:t>
-                      </a:r>
-                    </a:p>
-                  </a:txBody>
-                  <a:tcPr marL="68580" marR="68580" marT="0" marB="0">
-                    <a:noFill/>
-                  </a:tcPr>
-                </a:tc>
-                <a:tc>
-                  <a:txBody>
-                    <a:bodyPr/>
-                    <a:lstStyle/>
-                    <a:p>
-                      <a:pPr algn="ctr">
-                        <a:buNone/>
-                      </a:pPr>
-                      <a:r>
-                        <a:rPr lang="es-ES_tradnl" sz="900" dirty="0">
+                        <a:t>7.10</a:t>
+                      </a:r>
+                      <a:endParaRPr lang="de-DE" sz="900">
+                        <a:effectLst/>
+                        <a:latin typeface="Times New Roman" panose="02020603050405020304" pitchFamily="18" charset="0"/>
+                        <a:ea typeface="Times New Roman" panose="02020603050405020304" pitchFamily="18" charset="0"/>
+                        <a:cs typeface="Times New Roman" panose="02020603050405020304" pitchFamily="18" charset="0"/>
+                      </a:endParaRPr>
+                    </a:p>
+                  </a:txBody>
+                  <a:tcPr marL="68580" marR="68580" marT="0" marB="0">
+                    <a:noFill/>
+                  </a:tcPr>
+                </a:tc>
+                <a:tc>
+                  <a:txBody>
+                    <a:bodyPr/>
+                    <a:lstStyle/>
+                    <a:p>
+                      <a:pPr algn="ctr">
+                        <a:buNone/>
+                      </a:pPr>
+                      <a:r>
+                        <a:rPr lang="es-ES" sz="900">
                           <a:effectLst/>
                           <a:latin typeface="Times New Roman" panose="02020603050405020304" pitchFamily="18" charset="0"/>
                           <a:ea typeface="Times New Roman" panose="02020603050405020304" pitchFamily="18" charset="0"/>
                           <a:cs typeface="Times New Roman" panose="02020603050405020304" pitchFamily="18" charset="0"/>
                         </a:rPr>
-                        <a:t>3.21</a:t>
-                      </a:r>
-                    </a:p>
-                  </a:txBody>
-                  <a:tcPr marL="68580" marR="68580" marT="0" marB="0">
-                    <a:noFill/>
-                  </a:tcPr>
-                </a:tc>
-                <a:tc>
-                  <a:txBody>
-                    <a:bodyPr/>
-                    <a:lstStyle/>
-                    <a:p>
-                      <a:pPr algn="ctr">
-                        <a:buNone/>
-                      </a:pPr>
-                      <a:r>
-                        <a:rPr lang="es-ES_tradnl" sz="900" dirty="0">
+                        <a:t>3.22</a:t>
+                      </a:r>
+                      <a:endParaRPr lang="de-DE" sz="900">
+                        <a:effectLst/>
+                        <a:latin typeface="Times New Roman" panose="02020603050405020304" pitchFamily="18" charset="0"/>
+                        <a:ea typeface="Times New Roman" panose="02020603050405020304" pitchFamily="18" charset="0"/>
+                        <a:cs typeface="Times New Roman" panose="02020603050405020304" pitchFamily="18" charset="0"/>
+                      </a:endParaRPr>
+                    </a:p>
+                  </a:txBody>
+                  <a:tcPr marL="68580" marR="68580" marT="0" marB="0">
+                    <a:noFill/>
+                  </a:tcPr>
+                </a:tc>
+                <a:tc>
+                  <a:txBody>
+                    <a:bodyPr/>
+                    <a:lstStyle/>
+                    <a:p>
+                      <a:pPr algn="ctr">
+                        <a:buNone/>
+                      </a:pPr>
+                      <a:r>
+                        <a:rPr lang="es-ES" sz="900">
                           <a:effectLst/>
                           <a:latin typeface="Times New Roman" panose="02020603050405020304" pitchFamily="18" charset="0"/>
                           <a:ea typeface="Times New Roman" panose="02020603050405020304" pitchFamily="18" charset="0"/>
                           <a:cs typeface="Times New Roman" panose="02020603050405020304" pitchFamily="18" charset="0"/>
                         </a:rPr>
-                        <a:t>163.67</a:t>
-                      </a:r>
+                        <a:t>7.76</a:t>
+                      </a:r>
+                      <a:endParaRPr lang="de-DE" sz="900">
+                        <a:effectLst/>
+                        <a:latin typeface="Times New Roman" panose="02020603050405020304" pitchFamily="18" charset="0"/>
+                        <a:ea typeface="Times New Roman" panose="02020603050405020304" pitchFamily="18" charset="0"/>
+                        <a:cs typeface="Times New Roman" panose="02020603050405020304" pitchFamily="18" charset="0"/>
+                      </a:endParaRPr>
                     </a:p>
                   </a:txBody>
                   <a:tcPr marL="68580" marR="68580" marT="0" marB="0">
@@ -14544,106 +14784,136 @@
                         <a:buNone/>
                       </a:pPr>
                       <a:r>
-                        <a:rPr lang="es-ES_tradnl" sz="900" dirty="0">
+                        <a:rPr lang="es-ES" sz="900">
                           <a:effectLst/>
                           <a:latin typeface="Times New Roman" panose="02020603050405020304" pitchFamily="18" charset="0"/>
                           <a:ea typeface="Times New Roman" panose="02020603050405020304" pitchFamily="18" charset="0"/>
                           <a:cs typeface="Times New Roman" panose="02020603050405020304" pitchFamily="18" charset="0"/>
                         </a:rPr>
-                        <a:t>161.01</a:t>
-                      </a:r>
-                    </a:p>
-                  </a:txBody>
-                  <a:tcPr marL="68580" marR="68580" marT="0" marB="0">
-                    <a:noFill/>
-                  </a:tcPr>
-                </a:tc>
-                <a:tc>
-                  <a:txBody>
-                    <a:bodyPr/>
-                    <a:lstStyle/>
-                    <a:p>
-                      <a:pPr algn="ctr">
-                        <a:buNone/>
-                      </a:pPr>
-                      <a:r>
-                        <a:rPr lang="es-ES_tradnl" sz="900" dirty="0">
+                        <a:t>6.00</a:t>
+                      </a:r>
+                      <a:endParaRPr lang="de-DE" sz="900">
+                        <a:effectLst/>
+                        <a:latin typeface="Times New Roman" panose="02020603050405020304" pitchFamily="18" charset="0"/>
+                        <a:ea typeface="Times New Roman" panose="02020603050405020304" pitchFamily="18" charset="0"/>
+                        <a:cs typeface="Times New Roman" panose="02020603050405020304" pitchFamily="18" charset="0"/>
+                      </a:endParaRPr>
+                    </a:p>
+                  </a:txBody>
+                  <a:tcPr marL="68580" marR="68580" marT="0" marB="0">
+                    <a:noFill/>
+                  </a:tcPr>
+                </a:tc>
+                <a:tc>
+                  <a:txBody>
+                    <a:bodyPr/>
+                    <a:lstStyle/>
+                    <a:p>
+                      <a:pPr algn="ctr">
+                        <a:buNone/>
+                      </a:pPr>
+                      <a:r>
+                        <a:rPr lang="es-ES" sz="900">
                           <a:effectLst/>
                           <a:latin typeface="Times New Roman" panose="02020603050405020304" pitchFamily="18" charset="0"/>
                           <a:ea typeface="Times New Roman" panose="02020603050405020304" pitchFamily="18" charset="0"/>
                           <a:cs typeface="Times New Roman" panose="02020603050405020304" pitchFamily="18" charset="0"/>
                         </a:rPr>
-                        <a:t>28.23</a:t>
-                      </a:r>
-                    </a:p>
-                  </a:txBody>
-                  <a:tcPr marL="68580" marR="68580" marT="0" marB="0">
-                    <a:noFill/>
-                  </a:tcPr>
-                </a:tc>
-                <a:tc>
-                  <a:txBody>
-                    <a:bodyPr/>
-                    <a:lstStyle/>
-                    <a:p>
-                      <a:pPr algn="ctr">
-                        <a:buNone/>
-                      </a:pPr>
-                      <a:r>
-                        <a:rPr lang="es-ES_tradnl" sz="900" dirty="0">
+                        <a:t>1.86</a:t>
+                      </a:r>
+                      <a:endParaRPr lang="de-DE" sz="900">
+                        <a:effectLst/>
+                        <a:latin typeface="Times New Roman" panose="02020603050405020304" pitchFamily="18" charset="0"/>
+                        <a:ea typeface="Times New Roman" panose="02020603050405020304" pitchFamily="18" charset="0"/>
+                        <a:cs typeface="Times New Roman" panose="02020603050405020304" pitchFamily="18" charset="0"/>
+                      </a:endParaRPr>
+                    </a:p>
+                  </a:txBody>
+                  <a:tcPr marL="68580" marR="68580" marT="0" marB="0">
+                    <a:noFill/>
+                  </a:tcPr>
+                </a:tc>
+                <a:tc>
+                  <a:txBody>
+                    <a:bodyPr/>
+                    <a:lstStyle/>
+                    <a:p>
+                      <a:pPr algn="ctr">
+                        <a:buNone/>
+                      </a:pPr>
+                      <a:r>
+                        <a:rPr lang="es-ES" sz="900">
                           <a:effectLst/>
                           <a:latin typeface="Times New Roman" panose="02020603050405020304" pitchFamily="18" charset="0"/>
                           <a:ea typeface="Times New Roman" panose="02020603050405020304" pitchFamily="18" charset="0"/>
                           <a:cs typeface="Times New Roman" panose="02020603050405020304" pitchFamily="18" charset="0"/>
                         </a:rPr>
-                        <a:t>167.34</a:t>
-                      </a:r>
-                    </a:p>
-                  </a:txBody>
-                  <a:tcPr marL="68580" marR="68580" marT="0" marB="0">
-                    <a:noFill/>
-                  </a:tcPr>
-                </a:tc>
-                <a:tc>
-                  <a:txBody>
-                    <a:bodyPr/>
-                    <a:lstStyle/>
-                    <a:p>
-                      <a:pPr algn="ctr">
-                        <a:buNone/>
-                      </a:pPr>
-                      <a:r>
-                        <a:rPr lang="es-ES_tradnl" sz="900" dirty="0">
+                        <a:t>12.51</a:t>
+                      </a:r>
+                      <a:endParaRPr lang="de-DE" sz="900">
+                        <a:effectLst/>
+                        <a:latin typeface="Times New Roman" panose="02020603050405020304" pitchFamily="18" charset="0"/>
+                        <a:ea typeface="Times New Roman" panose="02020603050405020304" pitchFamily="18" charset="0"/>
+                        <a:cs typeface="Times New Roman" panose="02020603050405020304" pitchFamily="18" charset="0"/>
+                      </a:endParaRPr>
+                    </a:p>
+                  </a:txBody>
+                  <a:tcPr marL="68580" marR="68580" marT="0" marB="0">
+                    <a:noFill/>
+                  </a:tcPr>
+                </a:tc>
+                <a:tc>
+                  <a:txBody>
+                    <a:bodyPr/>
+                    <a:lstStyle/>
+                    <a:p>
+                      <a:pPr algn="ctr">
+                        <a:buNone/>
+                      </a:pPr>
+                      <a:r>
+                        <a:rPr lang="es-ES" sz="900">
                           <a:effectLst/>
                           <a:latin typeface="Times New Roman" panose="02020603050405020304" pitchFamily="18" charset="0"/>
                           <a:ea typeface="Times New Roman" panose="02020603050405020304" pitchFamily="18" charset="0"/>
                           <a:cs typeface="Times New Roman" panose="02020603050405020304" pitchFamily="18" charset="0"/>
                         </a:rPr>
-                        <a:t>4.47</a:t>
-                      </a:r>
-                    </a:p>
-                  </a:txBody>
-                  <a:tcPr marL="68580" marR="68580" marT="0" marB="0">
-                    <a:noFill/>
-                  </a:tcPr>
-                </a:tc>
-                <a:tc>
-                  <a:txBody>
-                    <a:bodyPr/>
-                    <a:lstStyle/>
-                    <a:p>
-                      <a:pPr algn="ctr">
-                        <a:buNone/>
-                      </a:pPr>
-                      <a:r>
-                        <a:rPr lang="es-ES_tradnl" sz="900" dirty="0">
+                        <a:t>4.29</a:t>
+                      </a:r>
+                      <a:endParaRPr lang="de-DE" sz="900">
+                        <a:effectLst/>
+                        <a:latin typeface="Times New Roman" panose="02020603050405020304" pitchFamily="18" charset="0"/>
+                        <a:ea typeface="Times New Roman" panose="02020603050405020304" pitchFamily="18" charset="0"/>
+                        <a:cs typeface="Times New Roman" panose="02020603050405020304" pitchFamily="18" charset="0"/>
+                      </a:endParaRPr>
+                    </a:p>
+                  </a:txBody>
+                  <a:tcPr marL="68580" marR="68580" marT="0" marB="0">
+                    <a:noFill/>
+                  </a:tcPr>
+                </a:tc>
+                <a:tc>
+                  <a:txBody>
+                    <a:bodyPr/>
+                    <a:lstStyle/>
+                    <a:p>
+                      <a:pPr algn="ctr">
+                        <a:buNone/>
+                      </a:pPr>
+                      <a:r>
+                        <a:rPr lang="es-ES" sz="900" dirty="0">
                           <a:effectLst/>
                           <a:latin typeface="Times New Roman" panose="02020603050405020304" pitchFamily="18" charset="0"/>
                           <a:ea typeface="Times New Roman" panose="02020603050405020304" pitchFamily="18" charset="0"/>
                           <a:cs typeface="Times New Roman" panose="02020603050405020304" pitchFamily="18" charset="0"/>
                         </a:rPr>
-                        <a:t>168.83</a:t>
-                      </a:r>
+                        <a:t>13.93</a:t>
+                      </a:r>
+                      <a:endParaRPr lang="de-DE" sz="900" dirty="0">
+                        <a:effectLst/>
+                        <a:latin typeface="Times New Roman" panose="02020603050405020304" pitchFamily="18" charset="0"/>
+                        <a:ea typeface="Times New Roman" panose="02020603050405020304" pitchFamily="18" charset="0"/>
+                        <a:cs typeface="Times New Roman" panose="02020603050405020304" pitchFamily="18" charset="0"/>
+                      </a:endParaRPr>
                     </a:p>
                   </a:txBody>
                   <a:tcPr marL="68580" marR="68580" marT="0" marB="0">
